--- a/slides/talk-controller/talk-controller.pptx
+++ b/slides/talk-controller/talk-controller.pptx
@@ -611,7 +611,7 @@
           <a:lstStyle/>
           <a:p>
             <a:r>
-              <a:t>두 연구 모두 MPPI 해에 되먹임 이득을 붙이는데, 얻는 방법이 다릅니다. CLIS-MPPI는 계획 시간 동안 로봇이 계속 움직인다는 점을 초기 상태 불확실성으로 바꾸고, 이득을 가중 공분산 회귀로 얻습니다. 다만 시행이 5번뿐이고 분산은 보고하지 않았습니다. Feedback-MPPI는 미분으로 이득을 얻어서 travplan처럼 계단 같은 비용에서는 의미를 잃습니다. travplan의 지연은 에피소드 안에서 일정한 이산값이라 CLIS의 가우시안 가정은 맞지 않고, 이 점은 최근 연구 비교에서 다시 봅니다.</a:t>
+              <a:t>두 연구 모두 MPPI 해에 피드백 이득을 붙이는데, 얻는 방법이 다릅니다. CLIS-MPPI는 계획 시간 동안 로봇이 계속 움직인다는 점을 초기 상태 불확실성으로 바꾸고, 이득을 가중 공분산 회귀로 얻습니다. 다만 시행이 5번뿐이고 분산은 보고하지 않았습니다. Feedback-MPPI는 미분으로 이득을 얻어서 travplan처럼 계단 같은 비용에서는 의미를 잃습니다. travplan의 지연은 에피소드 안에서 일정한 이산값이라 CLIS의 가우시안 가정은 맞지 않고, 이 점은 최근 연구 비교에서 다시 다룹니다.</a:t>
             </a:r>
           </a:p>
         </p:txBody>
@@ -681,7 +681,7 @@
           <a:lstStyle/>
           <a:p>
             <a:r>
-              <a:t>두 번째 부분은 rollout 모델입니다. 같은 MPPI 구조에서 미래를 예측하는 모델만 학습 모델로 바꾼 연구들을 봅니다. 마일스톤 네 편, 잔차를 얹는 최근 연구, 그리고 잔차를 GP로 할지 선형으로 할지에 대한 실측을 차례로 봅니다. 끝에는 GP가 바퀴 로봇에서 앉는 세 자리를 정리합니다.</a:t>
+              <a:t>두 번째 부분은 rollout 모델입니다. 같은 MPPI 구조에서 미래를 예측하는 모델만 학습 모델로 바꾼 연구들을 살펴봅니다. 마일스톤 네 편, 잔차를 얹는 최근 연구, 그리고 잔차를 GP로 할지 선형으로 할지에 대한 실측을 차례로 다룹니다. 끝에는 GP가 바퀴 로봇에서 앉는 세 자리를 정리합니다.</a:t>
             </a:r>
           </a:p>
         </p:txBody>
@@ -821,7 +821,7 @@
           <a:lstStyle/>
           <a:p>
             <a:r>
-              <a:t>뒤의 최근 연구는 이 네 편 위에 서 있습니다. PETS는 불확실성을 아는 동역학, IKD는 IMU로 지형 효과를 배우는 역운동 모델, RMA는 특권 정보를 잠재로 압축한 뒤 이력에서 추정하는 온라인 적응입니다. TD-MPC2는 잠재 공간에서 MPPI로 계획하는 모델 기반 RL입니다. 표의 수치는 모두 논문이 보고한 값입니다.</a:t>
+              <a:t>뒤의 최근 연구는 이 네 편 위에 서 있습니다. PETS는 불확실성을 아는 동역학, IKD는 IMU로 지형 효과를 배우는 역운동 모델, RMA는 privileged 정보를 latent로 압축한 뒤 이력에서 추정하는 온라인 적응입니다. TD-MPC2는 latent 공간에서 MPPI로 계획하는 모델 기반 RL입니다. 표의 수치는 모두 논문이 보고한 값입니다.</a:t>
             </a:r>
           </a:p>
         </p:txBody>
@@ -891,7 +891,7 @@
           <a:lstStyle/>
           <a:p>
             <a:r>
-              <a:t>세 연구 모두 큰 블랙박스 동역학을 처음부터 배우지 않습니다. 물리 모델이 대부분을 설명하고 신경망은 잔차만 맡으니 작아도 되고 빠릅니다. OptCar는 Orin에서 MPPI(표본 600, 지평 50)를 37 Hz로 돌렸습니다. OptCar 저자도 적었듯 합성 데이터의 자전거 모델에는 경사 효과가 빠져 있습니다. travplan의 남은 병목이 경사로(TP-0151)라서, 경사 슬립은 실제 데이터에서 배워야 합니다.</a:t>
+              <a:t>세 연구 모두 큰 블랙박스 동역학을 처음부터 배우지 않습니다. 물리 모델이 대부분을 설명하고 신경망은 잔차만 맡으니 작아도 되고 빠릅니다. OptCar는 Orin에서 MPPI(샘플 600, horizon 50)를 37 Hz로 돌렸습니다. OptCar 저자도 적었듯 합성 데이터의 자전거 모델에는 경사 효과가 빠져 있습니다. travplan의 남은 병목이 경사로(TP-0151)라서, 경사 슬립은 실제 데이터에서 배워야 합니다.</a:t>
             </a:r>
           </a:p>
         </p:txBody>
@@ -961,7 +961,7 @@
           <a:lstStyle/>
           <a:p>
             <a:r>
-              <a:t>바퀴 로봇 잔차의 큰 몫은 액추에이터 지연이고, 그것은 선형입니다. 비선형은 조향 포화와 비동축 스크럽처럼 요 축에 몰립니다. 그래서 GP를 쓰는 이유는 더 잘 맞아서가 아니라 분산이 필요해서입니다. travplan에서는 plant 식의 지연·슬립 계수가 기저 노릇을 하므로 학습 없이 같은 구조를 만들 수 있습니다. 첫 실험은 L1 레벨 3에서 mppi_plant_lag의 슬립 계수를 주행 중 추정하는 것입니다.</a:t>
+              <a:t>바퀴 로봇 잔차의 큰 몫은 액추에이터 지연이고, 그것은 선형입니다. 비선형은 조향 포화와 비동축 스크럽처럼 요 축에 몰립니다. 그래서 GP를 쓰는 이유는 더 잘 맞아서가 아니라 분산이 필요해서입니다. travplan에서는 plant 식의 지연·슬립 계수가 기저 역할을 하므로 학습 없이 같은 구조를 만들 수 있습니다. 첫 실험은 L1 레벨 3에서 mppi_plant_lag의 슬립 계수를 주행 중 추정하는 것입니다.</a:t>
             </a:r>
           </a:p>
         </p:txBody>
@@ -1101,7 +1101,7 @@
           <a:lstStyle/>
           <a:p>
             <a:r>
-              <a:t>세 번째 부분은 안전입니다. 동적 장애물을 다루는 두 구조를 먼저 보고, 후보 방식을 지연과 라이선스로 비교합니다. 그다음 확률 제약이 기대는 불확실성이 틀릴 때 어떤 일이 생기는지, barrier를 합치는 방식이 좁은 틈을 어떻게 닫는지, 표본으로 만드는 안전 필터를 봅니다.</a:t>
+              <a:t>세 번째 부분은 안전입니다. 동적 장애물을 다루는 두 구조를 먼저 살펴보고, 후보 방식을 지연과 라이선스로 비교합니다. 그다음 확률 제약이 기대는 불확실성이 틀릴 때 어떤 일이 생기는지, barrier를 합치는 방식이 좁은 틈을 어떻게 닫는지, 샘플로 만드는 안전 필터를 다룹니다.</a:t>
             </a:r>
           </a:p>
         </p:txBody>
@@ -1171,7 +1171,7 @@
           <a:lstStyle/>
           <a:p>
             <a:r>
-              <a:t>비용 통합형은 예측을 비용에 녹여 최적화가 알아서 피하게 하는 방식이고, travplan의 CostTerm 구조에 바로 붙습니다. 외부 필터형은 명령이 무엇이든 마지막에 최소한으로 고칩니다. 오른쪽 그림처럼 OcclusionCBF는 가려진 사각지대를 도달 가능 점유로 추정해 보이기 전에 개입합니다. 그러나 참조 구현이 Gurobi를 요구해서 보류했습니다.</a:t>
+              <a:t>비용 통합형은 예측을 비용에 넣어 최적화가 알아서 피하게 하는 방식이고, travplan의 CostTerm 구조에 바로 붙습니다. 외부 필터형은 명령이 무엇이든 마지막에 최소한으로 고칩니다. 오른쪽 그림처럼 OcclusionCBF는 가려진 사각지대를 도달 가능 occupancy로 추정해 보이기 전에 개입합니다. 그러나 참조 구현이 Gurobi를 요구해서 보류했습니다.</a:t>
             </a:r>
           </a:p>
         </p:txBody>
@@ -1241,7 +1241,7 @@
           <a:lstStyle/>
           <a:p>
             <a:r>
-              <a:t>후보를 지연, 보장, 의존성으로 비교했습니다. DRA-MPPI는 반복당 100 ms 안팎이라 Orin 실측이 없고, OA-MPC 계열은 48–200 ms라 예산 밖입니다. CVaR-BF는 공식 구현의 requirements를 직접 확인해 오픈소스 CasADi로 푼다는 것을 확인했습니다. 그래서 라이선스 걸림돌이 없는 첫 후보입니다.</a:t>
+              <a:t>후보를 지연, 보장, 의존성으로 비교했습니다. DRA-MPPI는 반복당 100 ms 안팎이라 Orin 실측이 없고, OA-MPC 계열은 48–200 ms라 예산 밖입니다. CVaR-BF는 공식 구현의 requirements를 직접 보고 오픈소스 CasADi로 푼다는 것을 확인했습니다. 그래서 라이선스 걸림돌이 없는 첫 후보입니다.</a:t>
             </a:r>
           </a:p>
         </p:txBody>
@@ -1311,7 +1311,7 @@
           <a:lstStyle/>
           <a:p>
             <a:r>
-              <a:t>여섯 부분으로 나눴습니다. 1–4는 리서치 문서의 탭 순서이고, 5는 2025–2026년 연구를 한 표로 비교한 절입니다. 6은 이 저장소에서 실제로 돌려 본 결과입니다. 각 연구는 travplan Controller의 어느 자리에 들어오는지를 중심으로 봅니다.</a:t>
+              <a:t>여섯 부분으로 나눴습니다. 1–4는 리서치 문서의 탭 순서이고, 5는 2025–2026년 연구를 한 표로 비교한 절입니다. 6은 이 저장소에서 실제로 돌려 본 결과입니다. 각 연구는 travplan Controller의 어느 자리에 들어오는지를 중심으로 살펴봅니다.</a:t>
             </a:r>
           </a:p>
         </p:txBody>
@@ -1451,7 +1451,7 @@
           <a:lstStyle/>
           <a:p>
             <a:r>
-              <a:t>TravMap에서는 치명 셀 하나하나가 barrier 후보라서 합치는 방식이 중요합니다. GS-MPPI처럼 soft-min으로 합치면 barrier가 많을수록 깎이는 몫이 커져 레벨 3 경사로의 0.2 m 띠 같은 좁은 통로가 먼저 닫힙니다. Exact-Safe MPPI는 틈을 지키지만 768 표본 × 40스텝마다 QP를 풀어야 합니다. Poisson 안전 함수는 격자 하나를 풀어 매끄러운 h를 주므로 합성 문제가 없습니다. G1에서 보행 제어기의 속도 추종 지연으로 h가 잠깐 음수가 됐다는 점은 스워브 조향 지연에도 같은 주의를 줍니다.</a:t>
+              <a:t>TravMap에서는 치명 셀 하나하나가 barrier 후보라서 합치는 방식이 중요합니다. GS-MPPI처럼 soft-min으로 합치면 barrier가 많을수록 깎이는 양이 커져 레벨 3 경사로의 폭 0.2 m 통로 같은 좁은 길이 먼저 닫힙니다. Exact-Safe MPPI는 틈을 지키지만 768 샘플 × 40스텝마다 QP를 풀어야 합니다. Poisson 안전 함수는 격자 하나를 풀어 매끄러운 h를 주므로 합성 문제가 없습니다. G1에서 보행 제어기의 속도 추종 지연으로 h가 잠깐 음수가 됐다는 점은 스워브 조향 지연에도 같은 주의를 줍니다.</a:t>
             </a:r>
           </a:p>
         </p:txBody>
@@ -1521,7 +1521,7 @@
           <a:lstStyle/>
           <a:p>
             <a:r>
-              <a:t>이 필터는 예측 안전 필터를 표본으로 구현한 것입니다. travplan MPPI는 이미 768개 rollout을 굴리므로 SV-MPC 없이도 같은 감시기를 만들 수 있습니다. 다만 travplan rollout은 정지로 끝나지 않으니 LagSlipSwerveModel로 제동 꼬리를 붙여야 하고, plant의 0.2 s 지연이 제동 거리를 늘립니다. Guidance 경로 추종은 안전이 확인된 열이 아니므로 백업이 될 수 없습니다. 넣는다면 시간 초과(TP-0151)가 늘지 않는지 함께 재야 합니다.</a:t>
+              <a:t>이 필터는 예측 안전 필터를 샘플로 구현한 것입니다. travplan MPPI는 이미 768개 rollout을 계산하므로 SV-MPC 없이도 같은 감시기를 만들 수 있습니다. 다만 travplan rollout은 정지로 끝나지 않으니 LagSlipSwerveModel로 제동 구간을 붙여야 하고, plant의 0.2 s 지연이 제동 거리를 늘립니다. Guidance 경로 추종은 안전이 확인된 시퀀스가 아니므로 백업이 될 수 없습니다. 넣는다면 시간 초과(TP-0151)가 늘지 않는지 함께 재야 합니다.</a:t>
             </a:r>
           </a:p>
         </p:txBody>
@@ -1591,7 +1591,7 @@
           <a:lstStyle/>
           <a:p>
             <a:r>
-              <a:t>네 번째 부분은 짧게 갑니다. travplan은 body twist까지만 내고, 스워브 모듈은 역기구학으로 풀 수 있어 관절 RL이 필요 없습니다. 그런데도 이 계열을 보는 이유는 커리큘럼, 입력, sim-to-real 장치가 travplan의 문제와 같기 때문입니다.</a:t>
+              <a:t>네 번째 부분은 짧게 갑니다. travplan은 body twist까지만 내고, 스워브 모듈은 역기구학으로 풀 수 있어 관절 RL이 필요 없습니다. 그런데도 이 계열을 살펴보는 이유는 커리큘럼, 입력, sim-to-real 장치가 travplan의 문제와 같기 때문입니다.</a:t>
             </a:r>
           </a:p>
         </p:txBody>
@@ -1661,7 +1661,7 @@
           <a:lstStyle/>
           <a:p>
             <a:r>
-              <a:t>지형 종류와 속도 명령을 함께 다루면 어느 과제가 더 쉬운지 순서를 매길 수 없습니다. LP-ACRL은 연속한 두 학습 단계의 보상 차이를 진척으로 재고, 그 값에 softmax를 걸어 표집합니다. 보상은 바꾸지 않고 어떤 과제를 얼마나 자주 보여줄지만 바꿉니다. 실물에서는 elevation mapping 잡음 때문에 특권 교사에서 LSTM 학생으로 증류했는데, travplan L1에서 Planner D가 떨어지는 문제(TP-0055)와 같은 처방입니다.</a:t>
+              <a:t>지형 종류와 속도 명령을 함께 다루면 어느 과제가 더 쉬운지 순서를 매길 수 없습니다. LP-ACRL은 연속한 두 학습 단계의 보상 차이를 진척으로 재고, 그 값에 softmax를 걸어 샘플링합니다. 보상은 바꾸지 않고 어떤 과제를 얼마나 자주 보여줄지만 바꿉니다. 실물에서는 elevation mapping 잡음 때문에 privileged 정보를 보는 teacher에서 LSTM student로 distillation했는데, travplan L1에서 Planner D 성능이 떨어지는 문제(TP-0055)와 같은 처방입니다.</a:t>
             </a:r>
           </a:p>
         </p:txBody>
@@ -1731,7 +1731,7 @@
           <a:lstStyle/>
           <a:p>
             <a:r>
-              <a:t>DreamWaQ는 공식 코드가 없어서 비공식 구현 넷을 읽고 돌려 봤습니다. 문맥 z가 실제로 작동하는 구현은 하나도 없었고, 유일하게 가중치를 싣는 M20 정책은 z 없이도 계단을 오릅니다. MuJoCo는 학습 시뮬레이터가 아니고 장면마다 seed 하나라서, 이 수치는 실물 성능을 말하지 않습니다. 이 계열에서 travplan이 가져올 것은 정책이 아니라 절차입니다. DreamWaQ++는 외수용이 믿을 만할 때만 쓰는 신뢰도 필터를 배우는데, travplan은 SIGMA를 들고만 있고 게이트로 쓰지 않습니다.</a:t>
+              <a:t>DreamWaQ는 공식 코드가 없어서 비공식 구현 넷을 읽고 돌려 봤습니다. 문맥 z가 실제로 작동하는 구현은 하나도 없었고, 유일하게 가중치를 싣는 M20 정책은 z 없이도 계단을 오릅니다. MuJoCo는 학습 시뮬레이터가 아니고 장면마다 seed 하나라서, 이 수치는 실물 성능을 말하지 않습니다. 이 계열에서 travplan이 가져올 것은 정책이 아니라 절차입니다. DreamWaQ++는 exteroception(카메라·LiDAR)이 믿을 만할 때만 쓰는 신뢰도 필터를 배우는데, travplan은 SIGMA를 들고만 있고 게이트로 쓰지 않습니다.</a:t>
             </a:r>
           </a:p>
         </p:txBody>
@@ -1871,7 +1871,7 @@
           <a:lstStyle/>
           <a:p>
             <a:r>
-              <a:t>표의 앞 절반입니다. MPPI 안쪽을 고친 연구와 확률 제약 연구를 모았습니다. 가중 평균 단계 자체를 바꾼 것은 OT-MPC 하나이고, 나머지는 시작점, prior를 넣는 자리, 위험을 재는 방식을 바꿨습니다. 실물 검증 여부가 연구마다 크게 다르다는 점도 함께 보시면 좋습니다.</a:t>
+              <a:t>표의 앞 절반입니다. MPPI 안쪽을 고친 연구와 확률 제약 연구를 모았습니다. 가중 평균 단계 자체를 바꾼 것은 OT-MPC 하나이고, 나머지는 시작점, prior를 넣는 자리, 위험을 재는 방식을 바꿨습니다. 실물 검증 여부가 연구마다 크게 다르다는 점도 함께 봐 두시면 좋습니다.</a:t>
             </a:r>
           </a:p>
         </p:txBody>
@@ -1941,7 +1941,7 @@
           <a:lstStyle/>
           <a:p>
             <a:r>
-              <a:t>표의 뒷 절반은 학습 동역학과 안전 필터입니다. 동역학 쪽은 모두 물리 모델 위에 작은 학습 몫을 얹고, 짧은 이력으로 숨은 조건을 나릅니다. 안전 필터 쪽은 해석적 위험 모델 대신 MPPI 표본을 감시기로 쓰는 연구가 늘었습니다. 공개 코드는 HDVIO2.0, Feedback-MPPI, Exact-Safe MPPI 정도만 확인했습니다.</a:t>
+              <a:t>표의 뒷 절반은 학습 동역학과 안전 필터입니다. 동역학 쪽은 모두 물리 모델 위에 작은 학습 모델을 얹고, 짧은 이력으로 숨은 조건을 전달합니다. 안전 필터 쪽은 해석적 위험 모델 대신 MPPI 샘플을 감시기로 쓰는 연구가 늘었습니다. 공개 코드는 HDVIO2.0, Feedback-MPPI, Exact-Safe MPPI 정도만 확인했습니다.</a:t>
             </a:r>
           </a:p>
         </p:txBody>
@@ -2011,7 +2011,7 @@
           <a:lstStyle/>
           <a:p>
             <a:r>
-              <a:t>공통점은 넷입니다. 첫째, 최적화기는 그대로 두고 rollout이 믿는 것을 고칩니다. 둘째와 셋째는 동역학 쪽으로, 작은 학습 몫과 짧은 이력입니다. 넷째는 안전 쪽으로, 해석적 위험 모델 없이 rollout 수로 확률을 잽니다. 첫째 공통점은 travplan의 저장소 규칙과 정확히 겹칩니다.</a:t>
+              <a:t>공통점은 넷입니다. 첫째, 최적화기는 그대로 두고 rollout이 믿는 것을 고칩니다. 둘째와 셋째는 동역학 쪽으로, 작은 학습 모델과 짧은 이력입니다. 넷째는 안전 쪽으로, 해석적 위험 모델 없이 rollout 수로 확률을 잽니다. 첫째 공통점은 travplan의 저장소 규칙과 정확히 겹칩니다.</a:t>
             </a:r>
           </a:p>
         </p:txBody>
@@ -2081,7 +2081,7 @@
           <a:lstStyle/>
           <a:p>
             <a:r>
-              <a:t>travplan은 costmap 대신 TravMap을 쓰고, Controller는 Planner의 경로를 받아 body twist를 냅니다. 실제 로봇은 비동축 스워브라서 명령과 실제 움직임 사이에 지연과 슬립이 있습니다. 이 plant 지연이 뒤의 작업 기록에서 가장 중요한 주제가 됩니다. MPPI와 NMPC는 강점이 갈려서 둘 다 개발합니다. 오늘은 MPPI 쪽을 주로 보고, NMPC는 비교 대상으로만 짚습니다.</a:t>
+              <a:t>travplan은 costmap 대신 TravMap을 쓰고, Controller는 Planner의 경로를 받아 body twist를 냅니다. 실제 로봇은 비동축 스워브라서 명령과 실제 움직임 사이에 지연과 슬립이 있습니다. 이 plant 지연이 뒤의 작업 기록에서 가장 중요한 주제가 됩니다. MPPI와 NMPC는 강점이 갈려서 둘 다 개발합니다. 오늘은 MPPI 쪽을 주로 다루고, NMPC는 비교 대상으로만 짚습니다.</a:t>
             </a:r>
           </a:p>
         </p:txBody>
@@ -2291,7 +2291,7 @@
           <a:lstStyle/>
           <a:p>
             <a:r>
-              <a:t>시도 순서는 값싼 측정부터입니다. TP-0032가 넣은 L0 지연을 켜면 스모크 한 판에서 12개 중 9개가 성공했는데, 짝 비교 전이라 판정이 아닙니다. 먼저 제어 지연만 켠 한 판으로 그 실패가 제어 지연에서 오는지 가립니다. 그다음 지연을 아는 MPPI를 혼돈 조건의 짝 비교로 봅니다. 모든 단계에서 치명 실패가 늘면 채택하지 않는다는 게이트 규칙이 걸립니다.</a:t>
+              <a:t>시도 순서는 값싼 측정부터입니다. TP-0032가 넣은 L0 지연을 켜면 스모크 한 판에서 12개 중 9개가 성공했는데, 짝 비교 전이라 판정이 아닙니다. 먼저 제어 지연만 켠 한 판으로 그 실패가 제어 지연에서 오는지 가려냅니다. 그다음 지연을 아는 MPPI를 혼돈 조건의 짝 비교로 평가합니다. 모든 단계에서 치명 실패가 늘면 채택하지 않는다는 게이트 규칙이 걸립니다.</a:t>
             </a:r>
           </a:p>
         </p:txBody>
@@ -2431,7 +2431,7 @@
           <a:lstStyle/>
           <a:p>
             <a:r>
-              <a:t>원인은 단순했습니다. 시뮬의 실제 가속이 MPPI가 믿는 1.0 m/s²의 3분의 1쯤이었습니다. rollout 모델에 1차 지연 0.2 s를 넣자 치명이 55에서 4로 줄었고, 최적화기는 고치지 않았습니다. 미끄럼까지 예측하는 mppi_plant는 치명은 같이 줄지만 진행이 막혀 189/360이라 선택 항목으로만 둡니다. 남은 것은 레벨 3 시간 초과 117/360이고, 그중 curb_ramp가 86/90입니다. 경사로는 중심이 지날 띠가 0.2 m라 plant 로봇의 설계 한계로 보고, 경사로를 뺀 성적도 함께 적습니다(TP-0151).</a:t>
+              <a:t>원인은 단순했습니다. 시뮬의 실제 가속이 MPPI가 믿는 1.0 m/s²의 3분의 1쯤이었습니다. rollout 모델에 1차 지연 0.2 s를 넣자 치명이 55에서 4로 줄었고, 최적화기는 고치지 않았습니다. 슬립까지 예측하는 mppi_plant는 치명은 같이 줄지만 진행이 막혀 189/360이라 선택 항목으로만 둡니다. 남은 것은 레벨 3 시간 초과 117/360이고, 그중 curb_ramp가 86/90입니다. 경사로는 로봇 중심이 지날 수 있는 폭이 0.2 m라 plant 로봇의 설계 한계로 보고, 경사로를 뺀 성적도 함께 적습니다(TP-0151).</a:t>
             </a:r>
           </a:p>
         </p:txBody>
@@ -2571,7 +2571,7 @@
           <a:lstStyle/>
           <a:p>
             <a:r>
-              <a:t>보행자 5명을 얹은 720 에피소드에서 충돌은 8건, 1.1 %였습니다. 재생하면 8건 모두 같은 시각에 다시 충돌했습니다. 레벨 3의 4건은 표본 전부가 같은 hard 벌점에 걸린 포화였고, 첫 겹침이 이를수록 벌점을 키운 등급화 벌점으로 없어졌습니다. 나머지 716 에피소드는 결과가 같았습니다. 배포 Controller를 바꿀지는 사용자 결정으로 남아 있고, 남은 4건은 실제 조향 한계 확인(TP-0163)에 달렸습니다.</a:t>
+              <a:t>보행자 5명을 얹은 720 에피소드에서 충돌은 8건, 1.1 %였습니다. 재생하면 8건 모두 같은 시각에 다시 충돌했습니다. 레벨 3의 4건은 샘플 전부가 같은 hard 페널티에 걸린 포화였고, 첫 겹침이 이를수록 페널티를 키운 등급화 페널티로 없어졌습니다. 나머지 716 에피소드는 결과가 같았습니다. 배포 Controller를 바꿀지는 사용자 결정으로 남아 있고, 남은 4건은 실제 조향 한계 확인(TP-0163)에 달렸습니다.</a:t>
             </a:r>
           </a:p>
         </p:txBody>
@@ -2641,7 +2641,7 @@
           <a:lstStyle/>
           <a:p>
             <a:r>
-              <a:t>MPOT과 OT-MPC 같은 최적 수송 최적화기를 들이기 전에, 멈춘 장면에 개선 여지가 있는지부터 쟀습니다. 멈춘 plant 장면 10개에 탐침 184개를 꽂고 오라클 다섯이 같은 목적함수를 다시 풀었습니다. 더 센 최적화기도 목적함수를 3% 안쪽으로만 낮추고 4초에 0.4 m를 넘게 나아가지 못했습니다. 치명의 단서는 모델 불일치였고, 이것이 TP-0149·0150의 plant 지연 작업으로 이어졌습니다.</a:t>
+              <a:t>MPOT과 OT-MPC 같은 최적 수송 최적화기를 들이기 전에, 멈춘 장면에 개선 여지가 있는지부터 쟀습니다. 멈춘 plant 장면 10개에 프로브 184개를 두고 오라클 다섯이 같은 목적함수를 다시 풀었습니다. 더 센 최적화기도 목적함수를 3% 안쪽으로만 낮추고 4초에 0.4 m를 넘게 나아가지 못했습니다. 치명의 단서는 모델 불일치였고, 이것이 TP-0149·0150의 plant 지연 작업으로 이어졌습니다.</a:t>
             </a:r>
           </a:p>
         </p:txBody>
@@ -2711,7 +2711,7 @@
           <a:lstStyle/>
           <a:p>
             <a:r>
-              <a:t>Playground에서 1,675개 가중치짜리 정책을 학습해 MPPI와 비교했습니다. 사족에서는 MPPI와 같은 성공에 도달 시간이 더 짧았고, 바퀴에서는 앞을 굴려 보지 못해 4건이 치명으로 졌습니다. 저장소 벤치마크에서도 8/12와 0.49 ms 대 12.4 ms로 같은 비율이 나왔습니다. 휴머노이드 결과는 같은 교훈을 반복합니다. 위에 앉은 MPPI는 아래 층의 지연을 알아야 합니다.</a:t>
+              <a:t>Playground에서 1,675개 가중치짜리 정책을 학습해 MPPI와 비교했습니다. 사족에서는 MPPI와 같은 성공에 도달 시간이 더 짧았고, 바퀴에서는 앞을 rollout해 보지 못해 4건이 치명으로 졌습니다. 저장소 벤치마크에서도 8/12와 0.49 ms 대 12.4 ms로 같은 비율이 나왔습니다. 휴머노이드 결과는 같은 교훈을 반복합니다. 상위의 MPPI는 하위 층의 지연을 알아야 합니다.</a:t>
             </a:r>
           </a:p>
         </p:txBody>
@@ -2991,7 +2991,7 @@
           <a:lstStyle/>
           <a:p>
             <a:r>
-              <a:t>첫 부분은 MPPI 계열입니다. MPPI의 기본 식을 보고, 십 년 동안 무엇이 바뀌었는지 훑습니다. 그다음 travplan에 실제로 들어온 SMPPI, prior를 넣는 방식인 ProxPI, 그리고 지연을 다루는 2025–2026년의 두 연구를 봅니다.</a:t>
+              <a:t>첫 부분은 MPPI 계열입니다. MPPI의 기본 식을 살펴보고, 십 년 동안 무엇이 바뀌었는지 훑습니다. 그다음 travplan에 실제로 들어온 SMPPI, prior를 넣는 방식인 ProxPI, 그리고 지연을 다루는 2025–2026년의 두 연구를 다룹니다.</a:t>
             </a:r>
           </a:p>
         </p:txBody>
@@ -3061,7 +3061,7 @@
           <a:lstStyle/>
           <a:p>
             <a:r>
-              <a:t>MPPI는 제어열에 잡음을 섞은 후보를 많이 굴리고, 비용의 지수 가중치로 평균해 새 제어열을 얻습니다. λ가 작을수록 가장 싼 몇 개에 표가 몰립니다. 2017년판은 이 갱신을 KL 기준으로 다시 유도해 일반 비선형 동역학으로 넓혔고, 1/5 크기 AutoRally 차량으로 흙길을 달렸습니다. travplan은 이 정보이론적 MPPI에 AR(1) 노이즈와 참조 추종 샘플을 더한 형태입니다.</a:t>
+              <a:t>MPPI는 제어 시퀀스에 노이즈를 섞은 후보를 많이 rollout하고, 비용의 지수 가중치로 평균해 새 제어 시퀀스를 얻습니다. λ가 작을수록 비용이 가장 낮은 몇 개에 가중치가 몰립니다. 2017년판은 이 갱신을 KL 기준으로 다시 유도해 일반 비선형 동역학으로 넓혔고, 1/5 크기 AutoRally 차량으로 흙길을 달렸습니다. travplan은 이 정보이론적 MPPI에 AR(1) 노이즈와 참조 추종 샘플을 더한 형태입니다.</a:t>
             </a:r>
           </a:p>
         </p:txBody>
@@ -3131,7 +3131,7 @@
           <a:lstStyle/>
           <a:p>
             <a:r>
-              <a:t>계보를 보면 MPPI의 가중 평균 자체는 거의 그대로이고, 샘플을 어디서 어떻게 뽑느냐와 구현이 바뀌었습니다. Robust MPPI는 실제 상태가 위험할 때 명목 상태를 유지해 외란에 버팁니다. MPPI-Generic은 Nav2의 CPU 구현(0.39–0.62 ms)보다 빠르고 PyTorch 기반 구현(25–48 ms)보다 두 자릿수 이상 빨랐습니다. Isaac이나 실물에서 슬립이 커지면 RMPPI식 명목 상태 선택도 다시 볼 후보입니다.</a:t>
+              <a:t>계보를 보면 MPPI의 가중 평균 자체는 거의 그대로이고, 샘플을 어디서 어떻게 뽑느냐와 구현이 바뀌었습니다. Robust MPPI는 실제 상태가 위험할 때 명목 상태를 유지해 외란에 버팁니다. MPPI-Generic은 Nav2의 CPU 구현(0.39–0.62 ms)보다 빠르고 PyTorch 기반 구현(25–48 ms)보다 두 자릿수 이상 빨랐습니다. Isaac이나 실물에서 슬립이 커지면 RMPPI식 명목 상태 선택도 다시 검토할 후보입니다.</a:t>
             </a:r>
           </a:p>
         </p:txBody>
@@ -3201,7 +3201,7 @@
           <a:lstStyle/>
           <a:p>
             <a:r>
-              <a:t>SMPPI의 세 요소 중 변화율 비용과 가중평균의 매끄러움 보존은 travplan MPPI에 이미 있었습니다. 그래서 노이즈를 변화율 공간에서 뽑는 것 하나만 바꾼 서브클래스로 비교했습니다. RMS jerk가 28% 줄었고 안전 지표는 그대로였습니다. ρ를 0.9로 올리면 더 빠르지만 gt_cost가 25% 나빠졌습니다. 기본 Controller는 바꾸지 않았고 선택 스택으로 둡니다.</a:t>
+              <a:t>SMPPI의 세 요소 중 변화율 비용과 가중평균의 매끄러움 보존은 travplan MPPI에 이미 있었습니다. 그래서 노이즈를 변화율 공간에서 샘플링하는 것 하나만 바꾼 서브클래스로 비교했습니다. RMS jerk가 28% 줄었고 안전 지표는 그대로였습니다. ρ를 0.9로 올리면 더 빠르지만 gt_cost가 25% 나빠졌습니다. 기본 Controller는 바꾸지 않았고 선택 스택으로 둡니다.</a:t>
             </a:r>
           </a:p>
         </p:txBody>
@@ -3271,7 +3271,7 @@
           <a:lstStyle/>
           <a:p>
             <a:r>
-              <a:t>Planner D 같은 학습 Planner의 출력을 MPPI에 넣는 방법의 문제입니다. 샘플 분포의 평균을 prior로 옮기면 prior가 틀릴 때마다 최적화기의 보정이 버려집니다. ProxPI는 prior를 부드러운 근접 비용으로만 넣어서 다른 비용 항이 해를 되돌릴 수 있게 합니다. travplan MPPIController는 이미 이 방향에 가깝지만, 30% 혼합이 더 나은지는 아직 재지 않았습니다.</a:t>
+              <a:t>Planner D 같은 학습 Planner의 출력을 MPPI에 어떻게 넣느냐의 문제입니다. 샘플 분포의 평균을 prior로 옮기면 prior가 틀릴 때마다 최적화기의 보정이 버려집니다. ProxPI는 prior를 부드러운 proximal 비용으로만 넣어서 다른 비용 항이 해를 되돌릴 수 있게 합니다. travplan MPPIController는 이미 이 방향에 가깝지만, 30% 혼합이 더 나은지는 아직 재지 않았습니다.</a:t>
             </a:r>
           </a:p>
         </p:txBody>
@@ -7007,7 +7007,7 @@
                 <a:ea typeface="Malgun Gothic"/>
                 <a:cs typeface="Malgun Gothic"/>
               </a:rPr>
-              <a:t>지연을 초기 상태 분포로 두고 rollout마다 시작점을 섭동한다. 가중 rollout의 회귀로 되먹임 이득을 얻는다. UR5e 실물 5회에서 MPPI는 2번 충돌, CLIS-MPPI는 0번.</a:t>
+              <a:t>지연을 초기 상태 분포로 두고 rollout마다 시작점을 섭동한다. 가중 rollout의 회귀로 피드백 이득을 얻는다. UR5e 실물 5회에서 MPPI는 2번 충돌, CLIS-MPPI는 0번.</a:t>
             </a:r>
           </a:p>
         </p:txBody>
@@ -7548,7 +7548,7 @@
                 <a:ea typeface="Malgun Gothic"/>
                 <a:cs typeface="Malgun Gothic"/>
               </a:rPr>
-              <a:t> 비용이 치명 셀·이진 충돌이라 기울기가 거의 0이다. 미분 이득보다 회귀 이득을 먼저 쓴다.</a:t>
+              <a:t> 비용이 치명 셀·이진 충돌이라 gradient가 거의 0이다. 미분 이득보다 회귀 이득을 먼저 쓴다.</a:t>
             </a:r>
           </a:p>
         </p:txBody>
@@ -7753,7 +7753,7 @@
                 <a:ea typeface="Malgun Gothic"/>
                 <a:cs typeface="Malgun Gothic"/>
               </a:rPr>
-              <a:t>MPPI가 굴려 보는</a:t>
+              <a:t>MPPI가 rollout하는</a:t>
             </a:r>
           </a:p>
           <a:p>
@@ -7812,7 +7812,7 @@
                 <a:ea typeface="Malgun Gothic"/>
                 <a:cs typeface="Malgun Gothic"/>
               </a:rPr>
-              <a:t>물리 모델 위의 작은 학습 몫, 짧은 이력, 그리고 불확실성</a:t>
+              <a:t>물리 모델 위의 작은 학습 모델, 짧은 이력, 그리고 불확실성</a:t>
             </a:r>
           </a:p>
         </p:txBody>
@@ -7983,7 +7983,7 @@
                 <a:ea typeface="Malgun Gothic"/>
                 <a:cs typeface="Malgun Gothic"/>
               </a:rPr>
-              <a:t>(평면 운동학)을 굴린 뒤 </a:t>
+              <a:t>(평면 운동학)을 rollout한 뒤 </a:t>
             </a:r>
             <a:r>
               <a:rPr sz="1050" b="0" i="0">
@@ -8059,7 +8059,7 @@
                 <a:ea typeface="Malgun Gothic"/>
                 <a:cs typeface="Malgun Gothic"/>
               </a:rPr>
-              <a:t>(RA-L 2023): 6자유도 운동, 힘 정답 없이 접촉 추정</a:t>
+              <a:t>(RA-L 2023): 6자유도 운동, 힘 라벨 없이 접촉 추정</a:t>
             </a:r>
           </a:p>
         </p:txBody>
@@ -8210,7 +8210,7 @@
                 <a:ea typeface="Malgun Gothic"/>
                 <a:cs typeface="Malgun Gothic"/>
               </a:rPr>
-              <a:t>잠재 문맥 온라인 적응</a:t>
+              <a:t>latent 문맥 온라인 적응</a:t>
             </a:r>
             <a:r>
               <a:rPr sz="1250" b="0" i="0">
@@ -8373,7 +8373,7 @@
                 <a:ea typeface="Malgun Gothic"/>
                 <a:cs typeface="Malgun Gothic"/>
               </a:rPr>
-              <a:t>지형 인지 운동 모델 + MPPI (Fig. 1): 지형이 차량 운동에 주는 영향을 예측해 위험한 궤적에 벌점 — 출처 [1]</a:t>
+              <a:t>지형 인지 운동 모델 + MPPI (Fig. 1): 지형이 차량 운동에 주는 영향을 예측해 위험한 궤적에 페널티 — 출처 [1]</a:t>
             </a:r>
           </a:p>
         </p:txBody>
@@ -8685,10 +8685,10 @@
                 <a:tableStyleId>{5C22544A-7EE6-4342-B048-85BDC9FD1C3A}</a:tableStyleId>
               </a:tblPr>
               <a:tblGrid>
-                <a:gridCol w="583803"/>
-                <a:gridCol w="1772047"/>
-                <a:gridCol w="3499644"/>
-                <a:gridCol w="4914106"/>
+                <a:gridCol w="576759"/>
+                <a:gridCol w="1750814"/>
+                <a:gridCol w="3586956"/>
+                <a:gridCol w="4855071"/>
               </a:tblGrid>
               <a:tr h="263634">
                 <a:tc>
@@ -9047,7 +9047,7 @@
                           <a:ea typeface="Malgun Gothic"/>
                           <a:cs typeface="Malgun Gothic"/>
                         </a:rPr>
-                        <a:t>환경 요인을 잠재 벡터로, 배포 때는 이력에서 추정</a:t>
+                        <a:t>환경 요인을 latent 벡터로, 배포 때는 이력에서 추정</a:t>
                       </a:r>
                     </a:p>
                   </a:txBody>
@@ -9145,7 +9145,7 @@
                           <a:ea typeface="Malgun Gothic"/>
                           <a:cs typeface="Malgun Gothic"/>
                         </a:rPr>
-                        <a:t>디코더 없는 잠재 world model 안에서 MPPI로 계획</a:t>
+                        <a:t>디코더 없는 latent world model 안에서 MPPI로 계획</a:t>
                       </a:r>
                     </a:p>
                   </a:txBody>
@@ -9424,11 +9424,11 @@
         <p:spPr>
           <a:xfrm>
             <a:off x="711200" y="3983633"/>
-            <a:ext cx="5257800" cy="820341"/>
+            <a:ext cx="5257800" cy="1041301"/>
           </a:xfrm>
           <a:prstGeom prst="roundRect">
             <a:avLst>
-              <a:gd name="adj" fmla="val 9288"/>
+              <a:gd name="adj" fmla="val 7317"/>
             </a:avLst>
           </a:prstGeom>
           <a:solidFill>
@@ -9484,7 +9484,7 @@
         <p:spPr>
           <a:xfrm>
             <a:off x="5962650" y="3983633"/>
-            <a:ext cx="6350" cy="820341"/>
+            <a:ext cx="6350" cy="1041301"/>
           </a:xfrm>
           <a:prstGeom prst="rect">
             <a:avLst/>
@@ -9512,7 +9512,7 @@
         </p:nvSpPr>
         <p:spPr>
           <a:xfrm>
-            <a:off x="711200" y="4797623"/>
+            <a:off x="711200" y="5018584"/>
             <a:ext cx="5257800" cy="6350"/>
           </a:xfrm>
           <a:prstGeom prst="rect">
@@ -9542,7 +9542,7 @@
         <p:spPr>
           <a:xfrm>
             <a:off x="711200" y="3983633"/>
-            <a:ext cx="50800" cy="820341"/>
+            <a:ext cx="50800" cy="1041301"/>
           </a:xfrm>
           <a:prstGeom prst="roundRect">
             <a:avLst>
@@ -9600,7 +9600,7 @@
                 <a:ea typeface="Malgun Gothic"/>
                 <a:cs typeface="Malgun Gothic"/>
               </a:rPr>
-              <a:t>이력이 숨은 조건을 나른다</a:t>
+              <a:t>이력이 숨은 조건을 전달한다</a:t>
             </a:r>
           </a:p>
         </p:txBody>
@@ -9614,7 +9614,7 @@
         <p:spPr>
           <a:xfrm>
             <a:off x="927100" y="4436963"/>
-            <a:ext cx="5041964" cy="327000"/>
+            <a:ext cx="5041964" cy="603200"/>
           </a:xfrm>
           <a:prstGeom prst="rect">
             <a:avLst/>
@@ -9641,7 +9641,7 @@
                 <a:ea typeface="Malgun Gothic"/>
                 <a:cs typeface="Malgun Gothic"/>
               </a:rPr>
-              <a:t>RMA의 "이력에서 잠재 추정"이 2026년 OptCar와 Continual VND의 뼈대다.</a:t>
+              <a:t>RMA의 "이력에서 latent 추정"이 2026년 OptCar와 Continual VND의 뼈대다.</a:t>
             </a:r>
           </a:p>
         </p:txBody>
@@ -9739,7 +9739,7 @@
                 <a:ea typeface="Malgun Gothic"/>
                 <a:cs typeface="Malgun Gothic"/>
               </a:rPr>
-              <a:t>RMA (Fig. 2): 특권 환경 요인을 잠재로 압축하고, 적응 모듈이 이력으로 추정한다</a:t>
+              <a:t>RMA (Fig. 2): privileged 환경 요인을 latent로 압축하고, 적응 모듈이 이력으로 추정한다</a:t>
             </a:r>
           </a:p>
         </p:txBody>
@@ -10468,7 +10468,7 @@
                 <a:ea typeface="Malgun Gothic"/>
                 <a:cs typeface="Malgun Gothic"/>
               </a:rPr>
-              <a:t>최근 0.4초 이력의 12차원 잠재로 잔차를 조건화하고 재생 버퍼로 기억한다. 반복되는 바람에서 회복이 약 5배 빠르다.</a:t>
+              <a:t>최근 0.4초 이력의 12차원 latent로 잔차를 조건화하고 replay 버퍼로 기억한다. 반복되는 바람에서 회복이 약 5배 빠르다.</a:t>
             </a:r>
           </a:p>
         </p:txBody>
@@ -11979,7 +11979,7 @@
                 <a:ea typeface="Malgun Gothic"/>
                 <a:cs typeface="Malgun Gothic"/>
               </a:rPr>
-              <a:t>신경 ODE 기저의 계수만 RLS로 갱신한다. 시뮬레이션 얼음 지형에서 약 5초 만에 적응했다.</a:t>
+              <a:t>Neural ODE 기저의 계수만 RLS로 갱신한다. 시뮬레이션 얼음 지형에서 약 5초 만에 적응했다.</a:t>
             </a:r>
           </a:p>
         </p:txBody>
@@ -13137,7 +13137,7 @@
         <p:spPr>
           <a:xfrm>
             <a:off x="6438900" y="1507728"/>
-            <a:ext cx="1789708" cy="241300"/>
+            <a:ext cx="1903016" cy="241300"/>
           </a:xfrm>
           <a:prstGeom prst="roundRect">
             <a:avLst>
@@ -13168,7 +13168,7 @@
         <p:spPr>
           <a:xfrm>
             <a:off x="6527800" y="1533128"/>
-            <a:ext cx="1685665" cy="288925"/>
+            <a:ext cx="1802372" cy="288925"/>
           </a:xfrm>
           <a:prstGeom prst="rect">
             <a:avLst/>
@@ -13195,7 +13195,7 @@
                 <a:ea typeface="Malgun Gothic"/>
                 <a:cs typeface="Malgun Gothic"/>
               </a:rPr>
-              <a:t>(a) acados NMPC + 조인 제약</a:t>
+              <a:t>(a) acados NMPC + 제약 조이기</a:t>
             </a:r>
           </a:p>
         </p:txBody>
@@ -13845,7 +13845,7 @@
                 <a:ea typeface="Malgun Gothic"/>
                 <a:cs typeface="Malgun Gothic"/>
               </a:rPr>
-              <a:t>비용에 녹일 것인가, 뒤에서 거를 것인가, 그리고 불확실성은 맞는가</a:t>
+              <a:t>비용에 넣을 것인가, 뒤에서 거를 것인가, 그리고 불확실성은 맞는가</a:t>
             </a:r>
           </a:p>
         </p:txBody>
@@ -16339,7 +16339,7 @@
                 <a:ea typeface="Malgun Gothic"/>
                 <a:cs typeface="Malgun Gothic"/>
               </a:rPr>
-              <a:t>TravMap 조회뿐이라 지연이 거의 없다. 보장은 없지만 동적 장애물을 충분히 시작했다.</a:t>
+              <a:t>TravMap 조회뿐이라 지연이 거의 없다. 보장은 없지만 동적 장애물 회피의 출발점으로는 충분했다.</a:t>
             </a:r>
           </a:p>
         </p:txBody>
@@ -17609,7 +17609,7 @@
                 <a:ea typeface="Malgun Gothic"/>
                 <a:cs typeface="Malgun Gothic"/>
               </a:rPr>
-              <a:t>MPPI가 굴려 보는 모델을 바꾼다</a:t>
+              <a:t>MPPI가 rollout하는 모델을 바꾼다</a:t>
             </a:r>
           </a:p>
         </p:txBody>
@@ -17912,7 +17912,7 @@
                 <a:ea typeface="Malgun Gothic"/>
                 <a:cs typeface="Malgun Gothic"/>
               </a:rPr>
-              <a:t>비용 통합형, CBF, 보정, 표본 감시</a:t>
+              <a:t>비용 통합형, CBF, 보정, 샘플 감시</a:t>
             </a:r>
           </a:p>
         </p:txBody>
@@ -17953,7 +17953,7 @@
                 <a:ea typeface="Malgun Gothic"/>
                 <a:cs typeface="Malgun Gothic"/>
               </a:rPr>
-              <a:t>비용에 녹이나, 뒤에서 거르나</a:t>
+              <a:t>비용에 넣나, 뒤에서 거르나</a:t>
             </a:r>
           </a:p>
         </p:txBody>
@@ -19479,7 +19479,7 @@
                 <a:ea typeface="Malgun Gothic"/>
                 <a:cs typeface="Malgun Gothic"/>
               </a:rPr>
-              <a:t>두 모듈을 과소신으로 두면 67.33%로 떨어진다. 위험이 넓게 퍼져 벌점이 작아지는 </a:t>
+              <a:t>두 모듈을 과소신으로 두면 67.33%로 떨어진다. 위험이 넓게 퍼져 페널티가 작아지는 </a:t>
             </a:r>
             <a:r>
               <a:rPr sz="1150" b="1" i="0">
@@ -20029,7 +20029,7 @@
                 <a:ea typeface="Malgun Gothic"/>
                 <a:cs typeface="Malgun Gothic"/>
               </a:rPr>
-              <a:t>를 조임에 쓰기 전에 L1 매퍼의 σ가 실제 고도 오차를 얼마나 덮는지부터 잰다.</a:t>
+              <a:t>로 제약을 조이기 전에 L1 매퍼의 σ가 실제 고도 오차를 얼마나 덮는지부터 잰다.</a:t>
             </a:r>
           </a:p>
         </p:txBody>
@@ -20496,7 +20496,7 @@
                 <a:ea typeface="Malgun Gothic"/>
                 <a:cs typeface="Malgun Gothic"/>
               </a:rPr>
-              <a:t>점유 지도의 장애물 경계를 </a:t>
+              <a:t>occupancy 지도의 장애물 경계를 </a:t>
             </a:r>
             <a:r>
               <a:rPr sz="1150" b="0" i="1">
@@ -21525,7 +21525,7 @@
                 <a:ea typeface="Malgun Gothic"/>
                 <a:cs typeface="Malgun Gothic"/>
               </a:rPr>
-              <a:t>cost ≥ 0.95인 칸</a:t>
+              <a:t>cost ≥ 0.95인 셀</a:t>
             </a:r>
           </a:p>
         </p:txBody>
@@ -22604,7 +22604,7 @@
                 <a:ea typeface="Malgun Gothic"/>
                 <a:cs typeface="Malgun Gothic"/>
               </a:rPr>
-              <a:t>C.4 · 표본 안전 필터</a:t>
+              <a:t>C.4 · 샘플 안전 필터</a:t>
             </a:r>
           </a:p>
         </p:txBody>
@@ -22645,7 +22645,7 @@
                 <a:ea typeface="Malgun Gothic"/>
                 <a:cs typeface="Malgun Gothic"/>
               </a:rPr>
-              <a:t>안전한 표본이 하나도 없을 때만 개입한다</a:t>
+              <a:t>안전한 샘플이 하나도 없을 때만 개입한다</a:t>
             </a:r>
           </a:p>
         </p:txBody>
@@ -22688,7 +22688,7 @@
                 <a:ea typeface="Malgun Gothic"/>
                 <a:cs typeface="Malgun Gothic"/>
               </a:rPr>
-              <a:t>명목 명령을 한 스텝 적용했다고 보고, 그 뒤 제어열을 Stein 변분 MPC로 뽑는다.</a:t>
+              <a:t>명목 명령을 한 스텝 적용했다고 가정하고, 그 뒤의 제어 시퀀스를 Stein 변분 MPC로 샘플링한다.</a:t>
             </a:r>
           </a:p>
         </p:txBody>
@@ -22731,7 +22731,7 @@
                 <a:ea typeface="Malgun Gothic"/>
                 <a:cs typeface="Malgun Gothic"/>
               </a:rPr>
-              <a:t>안전 = 지평 동안 위반 없음 + 끝 상태가 정지 가능한 불변 집합 안.</a:t>
+              <a:t>안전 = horizon 동안 위반 없음 + 종단 상태가 정지 가능한 불변 집합 안.</a:t>
             </a:r>
           </a:p>
         </p:txBody>
@@ -22774,7 +22774,7 @@
                 <a:ea typeface="Malgun Gothic"/>
                 <a:cs typeface="Malgun Gothic"/>
               </a:rPr>
-              <a:t>안전 표본이 없으면 저장한 백업 제어열의 첫 입력을 쓴다.</a:t>
+              <a:t>안전한 샘플이 없으면 저장해 둔 백업 제어 시퀀스의 첫 입력을 쓴다.</a:t>
             </a:r>
           </a:p>
         </p:txBody>
@@ -22817,7 +22817,7 @@
                 <a:ea typeface="Malgun Gothic"/>
                 <a:cs typeface="Malgun Gothic"/>
               </a:rPr>
-              <a:t>시나리오 기법으로 "괜히 개입할" 확률에 상한을 건다.</a:t>
+              <a:t>시나리오 기법으로 불필요하게 개입할 확률에 상한을 건다.</a:t>
             </a:r>
           </a:p>
         </p:txBody>
@@ -22956,7 +22956,7 @@
                 <a:ea typeface="Malgun Gothic"/>
                 <a:cs typeface="Malgun Gothic"/>
               </a:rPr>
-              <a:t>표본 안전 필터 (Fig. 1): SV-MPC 필터(a)와 CEM 필터(b). CEM 쪽은 교착에 빠진다 — 출처 [1]</a:t>
+              <a:t>샘플 안전 필터 (Fig. 1): SV-MPC 필터(a)와 CEM 필터(b). CEM 쪽은 교착에 빠진다 — 출처 [1]</a:t>
             </a:r>
           </a:p>
         </p:txBody>
@@ -23039,7 +23039,7 @@
                 <a:ea typeface="Malgun Gothic"/>
                 <a:cs typeface="Malgun Gothic"/>
               </a:rPr>
-              <a:t> 768 rollout에 제동 꼬리를 붙여 같은 감시기를 만든다. 백업은 직전 주기의 안전한 정지열이다.</a:t>
+              <a:t> 768 rollout에 제동 구간을 붙여 같은 감시기를 만든다. 백업은 직전 주기의 안전한 정지 시퀀스다.</a:t>
             </a:r>
           </a:p>
         </p:txBody>
@@ -23136,7 +23136,7 @@
                 <a:ea typeface="Malgun Gothic"/>
                 <a:cs typeface="Malgun Gothic"/>
               </a:rPr>
-              <a:t>[1] 표본 안전 필터, KAIST, arXiv:2604.22149 (2026, 시뮬레이션)</a:t>
+              <a:t>[1] 샘플 안전 필터, KAIST, arXiv:2604.22149 (2026, 시뮬레이션)</a:t>
             </a:r>
           </a:p>
         </p:txBody>
@@ -23303,7 +23303,7 @@
                 <a:ea typeface="Malgun Gothic"/>
                 <a:cs typeface="Malgun Gothic"/>
               </a:rPr>
-              <a:t>커리큘럼, 특권 정보 증류, 지도를 믿을지 정하는 신뢰도 게이트</a:t>
+              <a:t>커리큘럼, privileged 정보 distillation, 지도를 믿을지 정하는 신뢰도 게이트</a:t>
             </a:r>
           </a:p>
         </p:txBody>
@@ -23669,7 +23669,7 @@
                 <a:ea typeface="Malgun Gothic"/>
                 <a:cs typeface="Malgun Gothic"/>
               </a:rPr>
-              <a:t>travplan은 지금 지형 레벨을 균등 표집한다(TP-0039).</a:t>
+              <a:t>travplan은 지금 지형 레벨을 균등 샘플링한다(TP-0039).</a:t>
             </a:r>
           </a:p>
         </p:txBody>
@@ -23767,7 +23767,7 @@
                 <a:ea typeface="Malgun Gothic"/>
                 <a:cs typeface="Malgun Gothic"/>
               </a:rPr>
-              <a:t>LP-ACRL: 학습 진척을 온라인으로 재서 과제 표집 분포를 갱신한다 — 출처 [1]</a:t>
+              <a:t>LP-ACRL: 학습 진척을 온라인으로 재서 과제 샘플링 분포를 갱신한다 — 출처 [1]</a:t>
             </a:r>
           </a:p>
         </p:txBody>
@@ -24184,7 +24184,7 @@
                 <a:ea typeface="Malgun Gothic"/>
                 <a:cs typeface="Malgun Gothic"/>
               </a:rPr>
-              <a:t>z를 0이나 큰 잡음으로 바꿔도 결과가 같다. z 입력 열의 노름은 관측 열의 약 1/200이다.</a:t>
+              <a:t>z를 0이나 큰 노이즈로 바꿔도 결과가 같다. z 입력 열의 노름은 관측 열의 약 1/200이다.</a:t>
             </a:r>
           </a:p>
         </p:txBody>
@@ -24313,7 +24313,7 @@
                 <a:ea typeface="Malgun Gothic"/>
                 <a:cs typeface="Malgun Gothic"/>
               </a:rPr>
-              <a:t>2차원 '마찰' 추정은 걸음새에 따라 순위까지 뒤집혀 물리량이 아니다.</a:t>
+              <a:t>2차원 '마찰' 추정은 gait에 따라 순위까지 뒤집혀 물리량이 아니다.</a:t>
             </a:r>
           </a:p>
         </p:txBody>
@@ -25055,7 +25055,7 @@
                           <a:ea typeface="Malgun Gothic"/>
                           <a:cs typeface="Malgun Gothic"/>
                         </a:rPr>
-                        <a:t>MPPI 되먹임</a:t>
+                        <a:t>MPPI 피드백</a:t>
                       </a:r>
                     </a:p>
                   </a:txBody>
@@ -25177,7 +25177,7 @@
                           <a:ea typeface="Malgun Gothic"/>
                           <a:cs typeface="Malgun Gothic"/>
                         </a:rPr>
-                        <a:t>prior를 근접 비용으로</a:t>
+                        <a:t>prior를 proximal 비용으로</a:t>
                       </a:r>
                     </a:p>
                   </a:txBody>
@@ -25892,7 +25892,7 @@
                 <a:ea typeface="Malgun Gothic"/>
                 <a:cs typeface="Malgun Gothic"/>
               </a:rPr>
-              <a:t>동역학은 짧은 이력으로, 안전은 표본으로 잡는다</a:t>
+              <a:t>동역학은 짧은 이력으로, 안전은 샘플로 판정한다</a:t>
             </a:r>
           </a:p>
         </p:txBody>
@@ -26180,7 +26180,7 @@
                           <a:ea typeface="Malgun Gothic"/>
                           <a:cs typeface="Malgun Gothic"/>
                         </a:rPr>
-                        <a:t>0.4 s 이력의 잠재, 재생 버퍼</a:t>
+                        <a:t>0.4 s 이력의 latent, replay 버퍼</a:t>
                       </a:r>
                     </a:p>
                   </a:txBody>
@@ -26524,7 +26524,7 @@
                           <a:ea typeface="Malgun Gothic"/>
                           <a:cs typeface="Malgun Gothic"/>
                         </a:rPr>
-                        <a:t>표본 안전 필터 (2026)</a:t>
+                        <a:t>샘플 안전 필터 (2026)</a:t>
                       </a:r>
                     </a:p>
                   </a:txBody>
@@ -26572,7 +26572,7 @@
                           <a:ea typeface="Malgun Gothic"/>
                           <a:cs typeface="Malgun Gothic"/>
                         </a:rPr>
-                        <a:t>안전 표본이 없을 때만 백업</a:t>
+                        <a:t>안전한 샘플이 없을 때만 백업</a:t>
                       </a:r>
                     </a:p>
                   </a:txBody>
@@ -26895,7 +26895,7 @@
                 <a:ea typeface="Malgun Gothic"/>
                 <a:cs typeface="Malgun Gothic"/>
               </a:rPr>
-              <a:t>rollout을 고치고, 확률은 표본으로 잰다</a:t>
+              <a:t>rollout을 고치고, 확률은 샘플로 잰다</a:t>
             </a:r>
           </a:p>
         </p:txBody>
@@ -27523,7 +27523,7 @@
                 <a:ea typeface="Malgun Gothic"/>
                 <a:cs typeface="Malgun Gothic"/>
               </a:rPr>
-              <a:t>물리 모델 위에 작은 학습 몫</a:t>
+              <a:t>물리 모델 위에 작은 학습 모델</a:t>
             </a:r>
           </a:p>
         </p:txBody>
@@ -27889,7 +27889,7 @@
                 <a:ea typeface="Malgun Gothic"/>
                 <a:cs typeface="Malgun Gothic"/>
               </a:rPr>
-              <a:t>짧은 이력이 숨은 조건을 나른다</a:t>
+              <a:t>짧은 이력이 숨은 조건을 전달한다</a:t>
             </a:r>
           </a:p>
         </p:txBody>
@@ -28233,7 +28233,7 @@
                 <a:ea typeface="Malgun Gothic"/>
                 <a:cs typeface="Malgun Gothic"/>
               </a:rPr>
-              <a:t>표본이 곧 안전 판정이다</a:t>
+              <a:t>샘플이 곧 안전 판정이다</a:t>
             </a:r>
           </a:p>
         </p:txBody>
@@ -28274,7 +28274,7 @@
                 <a:ea typeface="Malgun Gothic"/>
                 <a:cs typeface="Malgun Gothic"/>
               </a:rPr>
-              <a:t>DRA·DUCCT는 몬테카를로로, 표본 안전 필터는 "안전 표본이 하나라도 있나"로 판정한다.</a:t>
+              <a:t>DRA·DUCCT는 몬테카를로로, 샘플 안전 필터는 "안전한 샘플이 하나라도 있나"로 판정한다.</a:t>
             </a:r>
           </a:p>
         </p:txBody>
@@ -28315,7 +28315,7 @@
                 <a:ea typeface="Malgun Gothic"/>
                 <a:cs typeface="Malgun Gothic"/>
               </a:rPr>
-              <a:t>travplan: 768 rollout을 감시기로(표본 백업 감시 후보)</a:t>
+              <a:t>travplan: 768 rollout을 감시기로(샘플 백업 감시 후보)</a:t>
             </a:r>
           </a:p>
         </p:txBody>
@@ -30749,7 +30749,7 @@
                           <a:ea typeface="Malgun Gothic"/>
                           <a:cs typeface="Malgun Gothic"/>
                         </a:rPr>
-                        <a:t>, VND) · 시작 상태 분포(CLIS) · 실행 뒤 되먹임(F-MPPI)</a:t>
+                        <a:t>, VND) · 시작 상태 분포(CLIS) · 실행 뒤 피드백(F-MPPI)</a:t>
                       </a:r>
                     </a:p>
                   </a:txBody>
@@ -30971,7 +30971,7 @@
                           <a:ea typeface="Malgun Gothic"/>
                           <a:cs typeface="Malgun Gothic"/>
                         </a:rPr>
-                        <a:t>비용 벌점 · 외부 필터(Poisson, 표본) · MPPI 안 CBF(GS, Exact-Safe)</a:t>
+                        <a:t>비용 페널티 · 외부 필터(Poisson, 샘플) · MPPI 안 CBF(GS, Exact-Safe)</a:t>
                       </a:r>
                     </a:p>
                   </a:txBody>
@@ -31069,7 +31069,7 @@
                           <a:ea typeface="Malgun Gothic"/>
                           <a:cs typeface="Malgun Gothic"/>
                         </a:rPr>
-                        <a:t>시뮬뿐: DUCCT, 표본 필터, Exact-Safe, OT-MPC</a:t>
+                        <a:t>시뮬뿐: DUCCT, 샘플 필터, Exact-Safe, OT-MPC</a:t>
                       </a:r>
                     </a:p>
                   </a:txBody>
@@ -31310,7 +31310,7 @@
                 <a:ea typeface="Malgun Gothic"/>
                 <a:cs typeface="Malgun Gothic"/>
               </a:rPr>
-              <a:t>계획 시작 상태를 이미 보냈지만 아직 바퀴에 닿지 않은 명령으로 명령이 걸릴 시각까지 굴린 뒤 거기서 최적화한다. Controller는 자기 명령 기록을 알므로 이 부분은 결정적이다.</a:t>
+              <a:t>이미 보냈지만 아직 바퀴에 닿지 않은 명령으로 계획 시작 상태를 명령이 적용될 시각까지 전방 시뮬레이션한 뒤 거기서 최적화한다. Controller는 자기 명령 기록을 알므로 이 부분은 결정적이다.</a:t>
             </a:r>
           </a:p>
         </p:txBody>
@@ -31393,7 +31393,7 @@
                 <a:ea typeface="Malgun Gothic"/>
                 <a:cs typeface="Malgun Gothic"/>
               </a:rPr>
-              <a:t> 지금 시뮬의 지연은 에피소드 안에서 일정한 이산값이다. 그래서 동역학 또는 시작 상태를 결정적으로 굴리는 쪽이 맞다.</a:t>
+              <a:t> 지금 시뮬의 지연은 에피소드 안에서 일정한 이산값이다. 그래서 동역학 또는 시작 상태를 결정적으로 예측하는 쪽이 맞다.</a:t>
             </a:r>
           </a:p>
         </p:txBody>
@@ -31578,11 +31578,11 @@
         <p:spPr>
           <a:xfrm>
             <a:off x="711200" y="1852513"/>
-            <a:ext cx="5257800" cy="1620441"/>
+            <a:ext cx="5257800" cy="2062361"/>
           </a:xfrm>
           <a:prstGeom prst="roundRect">
             <a:avLst>
-              <a:gd name="adj" fmla="val 4702"/>
+              <a:gd name="adj" fmla="val 3694"/>
             </a:avLst>
           </a:prstGeom>
           <a:solidFill>
@@ -31638,7 +31638,7 @@
         <p:spPr>
           <a:xfrm>
             <a:off x="5962650" y="1852513"/>
-            <a:ext cx="6350" cy="1620441"/>
+            <a:ext cx="6350" cy="2062361"/>
           </a:xfrm>
           <a:prstGeom prst="rect">
             <a:avLst/>
@@ -31666,7 +31666,7 @@
         </p:nvSpPr>
         <p:spPr>
           <a:xfrm>
-            <a:off x="711200" y="3466604"/>
+            <a:off x="711200" y="3908524"/>
             <a:ext cx="5257800" cy="6350"/>
           </a:xfrm>
           <a:prstGeom prst="rect">
@@ -31696,7 +31696,7 @@
         <p:spPr>
           <a:xfrm>
             <a:off x="711200" y="1852513"/>
-            <a:ext cx="50800" cy="1620441"/>
+            <a:ext cx="50800" cy="2062361"/>
           </a:xfrm>
           <a:prstGeom prst="roundRect">
             <a:avLst>
@@ -31839,7 +31839,7 @@
                 <a:ea typeface="Malgun Gothic"/>
                 <a:cs typeface="Malgun Gothic"/>
               </a:rPr>
-              <a:t> 아는 명령 기록은 결정적으로 굴리고, 모르는 지연 스텝 수만 rollout마다 이산값으로 뽑는다.</a:t>
+              <a:t> 아는 명령 기록은 결정적으로 전방 시뮬레이션하고, 모르는 지연 스텝 수만 rollout마다 이산값으로 샘플링한다.</a:t>
             </a:r>
           </a:p>
         </p:txBody>
@@ -31853,7 +31853,7 @@
         <p:spPr>
           <a:xfrm>
             <a:off x="965200" y="2821484"/>
-            <a:ext cx="5002720" cy="327000"/>
+            <a:ext cx="5002720" cy="603200"/>
           </a:xfrm>
           <a:prstGeom prst="rect">
             <a:avLst/>
@@ -31915,7 +31915,7 @@
                 <a:ea typeface="Malgun Gothic"/>
                 <a:cs typeface="Malgun Gothic"/>
               </a:rPr>
-              <a:t>의 확률 출력부터 정의하고 근접 사건까지 센다.</a:t>
+              <a:t>의 확률 출력부터 정의하고 근접 사건(near miss)까지 센다.</a:t>
             </a:r>
           </a:p>
         </p:txBody>
@@ -31928,8 +31928,8 @@
         </p:nvSpPr>
         <p:spPr>
           <a:xfrm>
-            <a:off x="965200" y="3105944"/>
-            <a:ext cx="5002720" cy="327000"/>
+            <a:off x="965200" y="3326904"/>
+            <a:ext cx="5002720" cy="603200"/>
           </a:xfrm>
           <a:prstGeom prst="rect">
             <a:avLst/>
@@ -31958,7 +31958,7 @@
                 <a:ea typeface="Malgun Gothic"/>
                 <a:cs typeface="Malgun Gothic"/>
               </a:rPr>
-              <a:t>표본 백업 감시.</a:t>
+              <a:t>샘플 백업 감시.</a:t>
             </a:r>
             <a:r>
               <a:rPr sz="1150" b="0" i="0">
@@ -31969,7 +31969,7 @@
                 <a:ea typeface="Malgun Gothic"/>
                 <a:cs typeface="Malgun Gothic"/>
               </a:rPr>
-              <a:t> 정지 가능한 안전 표본이 없을 때만 저장한 정지열로 바꾼다.</a:t>
+              <a:t> 정지 가능한 안전한 샘플이 없을 때만 저장해 둔 정지 시퀀스로 바꾼다.</a:t>
             </a:r>
           </a:p>
         </p:txBody>
@@ -32244,7 +32244,7 @@
                 <a:ea typeface="Malgun Gothic"/>
                 <a:cs typeface="Malgun Gothic"/>
               </a:rPr>
-              <a:t>(Feedback-MPPI). 비용 기울기가 거의 0이고 MPPI는 매 주기 다시 푼다.</a:t>
+              <a:t>(Feedback-MPPI). 비용 gradient가 거의 0이고 MPPI는 매 주기 다시 푼다.</a:t>
             </a:r>
           </a:p>
         </p:txBody>
@@ -32365,7 +32365,7 @@
         </p:nvSpPr>
         <p:spPr>
           <a:xfrm>
-            <a:off x="711200" y="3650754"/>
+            <a:off x="711200" y="4092674"/>
             <a:ext cx="10769600" cy="502543"/>
           </a:xfrm>
           <a:prstGeom prst="roundRect">
@@ -32396,7 +32396,7 @@
         </p:nvSpPr>
         <p:spPr>
           <a:xfrm>
-            <a:off x="889000" y="3777754"/>
+            <a:off x="889000" y="4219674"/>
             <a:ext cx="10751820" cy="361479"/>
           </a:xfrm>
           <a:prstGeom prst="rect">
@@ -32543,7 +32543,7 @@
                 <a:ea typeface="Malgun Gothic"/>
                 <a:cs typeface="Malgun Gothic"/>
               </a:rPr>
-              <a:t>지연 실패의 출처부터 가린다</a:t>
+              <a:t>지연 실패의 원인부터 가려낸다</a:t>
             </a:r>
           </a:p>
         </p:txBody>
@@ -32608,9 +32608,9 @@
                 <a:tableStyleId>{5C22544A-7EE6-4342-B048-85BDC9FD1C3A}</a:tableStyleId>
               </a:tblPr>
               <a:tblGrid>
-                <a:gridCol w="521295"/>
-                <a:gridCol w="6632972"/>
-                <a:gridCol w="3615333"/>
+                <a:gridCol w="507206"/>
+                <a:gridCol w="6744494"/>
+                <a:gridCol w="3517900"/>
               </a:tblGrid>
               <a:tr h="263634">
                 <a:tc>
@@ -32758,7 +32758,7 @@
                           <a:ea typeface="Malgun Gothic"/>
                           <a:cs typeface="Malgun Gothic"/>
                         </a:rPr>
-                        <a:t>의 치명 3/12가 제어 지연에서 오는지 본다</a:t>
+                        <a:t>의 치명 3/12가 제어 지연에서 오는지 확인한다</a:t>
                       </a:r>
                     </a:p>
                   </a:txBody>
@@ -32832,7 +32832,7 @@
                           <a:ea typeface="Malgun Gothic"/>
                           <a:cs typeface="Malgun Gothic"/>
                         </a:rPr>
-                        <a:t>지연을 아는 MPPI(TP-0170): 상태 예측기 판과, 지연 스텝 수를 0–3에서 뽑는 혼합 판</a:t>
+                        <a:t>지연을 아는 MPPI(TP-0170): 상태 예측기 변형과, 지연 스텝 수를 0–3에서 샘플링하는 혼합 변형</a:t>
                       </a:r>
                     </a:p>
                   </a:txBody>
@@ -32906,7 +32906,7 @@
                           <a:ea typeface="Malgun Gothic"/>
                           <a:cs typeface="Malgun Gothic"/>
                         </a:rPr>
-                        <a:t>위험 보정 지표: 실행 스텝의 확률 출력을 정의하고 TP-0154 묶음으로 신뢰도 도표</a:t>
+                        <a:t>위험 보정 지표: 실행 스텝의 확률 출력을 정의하고 TP-0154 에피소드로 신뢰도 도표</a:t>
                       </a:r>
                     </a:p>
                   </a:txBody>
@@ -32980,7 +32980,7 @@
                           <a:ea typeface="Malgun Gothic"/>
                           <a:cs typeface="Malgun Gothic"/>
                         </a:rPr>
-                        <a:t>표본 백업 감시: 제동 꼬리, 정지 가능한 안전 표본 수를 기록</a:t>
+                        <a:t>샘플 백업 감시: 제동 구간, 정지 가능한 안전한 샘플 수를 기록</a:t>
                       </a:r>
                     </a:p>
                   </a:txBody>
@@ -33111,7 +33111,7 @@
                           <a:ea typeface="Malgun Gothic"/>
                           <a:cs typeface="Malgun Gothic"/>
                         </a:rPr>
-                        <a:t>의 덮음부터</a:t>
+                        <a:t>의 coverage부터</a:t>
                       </a:r>
                     </a:p>
                   </a:txBody>
@@ -34661,7 +34661,7 @@
                 <a:ea typeface="Malgun Gothic"/>
                 <a:cs typeface="Malgun Gothic"/>
               </a:rPr>
-              <a:t>8건 모두 직전에 MPPI 표본 전부가 보행자 hard 벌점에 걸렸다. 벌점이 상수가 되면 참조를 따라 전진한다.</a:t>
+              <a:t>8건 모두 직전에 MPPI 샘플 전부가 보행자 hard 페널티에 걸렸다. 페널티가 상수가 되면 참조를 따라 전진한다.</a:t>
             </a:r>
           </a:p>
         </p:txBody>
@@ -34824,7 +34824,7 @@
         <p:spPr>
           <a:xfrm>
             <a:off x="4567734" y="4974828"/>
-            <a:ext cx="1389559" cy="241300"/>
+            <a:ext cx="1502866" cy="241300"/>
           </a:xfrm>
           <a:prstGeom prst="roundRect">
             <a:avLst>
@@ -34855,7 +34855,7 @@
         <p:spPr>
           <a:xfrm>
             <a:off x="4656634" y="5000228"/>
-            <a:ext cx="1273511" cy="288925"/>
+            <a:ext cx="1390218" cy="288925"/>
           </a:xfrm>
           <a:prstGeom prst="rect">
             <a:avLst/>
@@ -34882,7 +34882,7 @@
                 <a:ea typeface="Malgun Gothic"/>
                 <a:cs typeface="Malgun Gothic"/>
               </a:rPr>
-              <a:t>등급화 벌점 · TP-0161</a:t>
+              <a:t>등급화 페널티 · TP-0161</a:t>
             </a:r>
           </a:p>
         </p:txBody>
@@ -35196,7 +35196,7 @@
                 <a:ea typeface="Malgun Gothic"/>
                 <a:cs typeface="Malgun Gothic"/>
               </a:rPr>
-              <a:t>bumps 레벨 0 seed 1의 정면 보행자. plant 조향 한계 56.2° 때문에 옆걸음을 못 한다.</a:t>
+              <a:t>bumps 레벨 0 seed 1의 정면 보행자. plant 조향 한계 56.2° 때문에 횡이동을 못 한다.</a:t>
             </a:r>
           </a:p>
         </p:txBody>
@@ -36034,7 +36034,7 @@
                 <a:ea typeface="Malgun Gothic"/>
                 <a:cs typeface="Malgun Gothic"/>
               </a:rPr>
-              <a:t>지도와 rollout이 비싼 쪽은 기동력이 낮은 바퀴다</a:t>
+              <a:t>지도와 rollout이 꼭 필요한 쪽은 기동력이 낮은 바퀴다</a:t>
             </a:r>
           </a:p>
         </p:txBody>
@@ -36918,7 +36918,7 @@
                 <a:ea typeface="Malgun Gothic"/>
                 <a:cs typeface="Malgun Gothic"/>
               </a:rPr>
-              <a:t>하체 지연을 모르는 MPPI는 6/10, 롤아웃에 지연을 넣으면 10/10.</a:t>
+              <a:t>하체 지연을 모르는 MPPI는 6/10, rollout에 지연을 넣으면 10/10.</a:t>
             </a:r>
           </a:p>
         </p:txBody>
@@ -37810,7 +37810,7 @@
                 <a:ea typeface="Malgun Gothic"/>
                 <a:cs typeface="Malgun Gothic"/>
               </a:rPr>
-              <a:t>등급화 벌점 배포 결정과 실제 조향 한계 확인(TP-0161, TP-0163).</a:t>
+              <a:t>등급화 페널티 배포 결정과 실제 조향 한계 확인(TP-0161, TP-0163).</a:t>
             </a:r>
           </a:p>
         </p:txBody>
@@ -38809,7 +38809,7 @@
                 <a:ea typeface="Malgun Gothic"/>
                 <a:cs typeface="Malgun Gothic"/>
               </a:rPr>
-              <a:t>MPPI가 미래를 굴려 보는 모델을 바꾼다.</a:t>
+              <a:t>MPPI가 미래를 rollout하는 모델을 바꾼다.</a:t>
             </a:r>
           </a:p>
         </p:txBody>
@@ -39320,7 +39320,7 @@
                 <a:ea typeface="Malgun Gothic"/>
                 <a:cs typeface="Malgun Gothic"/>
               </a:rPr>
-              <a:t>이 챕터: CVaR-BF, Poisson 안전 함수, 표본 안전 필터</a:t>
+              <a:t>이 챕터: CVaR-BF, Poisson 안전 함수, 샘플 안전 필터</a:t>
             </a:r>
           </a:p>
         </p:txBody>
@@ -39383,7 +39383,7 @@
                 <a:ea typeface="Malgun Gothic"/>
                 <a:cs typeface="Malgun Gothic"/>
               </a:rPr>
-              <a:t>)는 건드리지 않는다. 그래서 이 규칙에 맞는지가 첫 번째 거름망이다.</a:t>
+              <a:t>)는 건드리지 않는다. 그래서 이 규칙에 맞는지가 첫 번째 기준이다.</a:t>
             </a:r>
           </a:p>
         </p:txBody>
@@ -39984,7 +39984,7 @@
                 <a:ea typeface="Malgun Gothic"/>
                 <a:cs typeface="Malgun Gothic"/>
               </a:rPr>
-              <a:t>Poisson 안전 함수 arXiv:2505.06794 · GS-MPPI arXiv:2410.02154 · Exact-Safe MPPI arXiv:2610.07369 · 표본 안전 필터 arXiv:2604.22149</a:t>
+              <a:t>Poisson 안전 함수 arXiv:2505.06794 · GS-MPPI arXiv:2410.02154 · Exact-Safe MPPI arXiv:2610.07369 · 샘플 안전 필터 arXiv:2604.22149</a:t>
             </a:r>
           </a:p>
         </p:txBody>
@@ -40229,7 +40229,7 @@
                 <a:ea typeface="Malgun Gothic"/>
                 <a:cs typeface="Malgun Gothic"/>
               </a:rPr>
-              <a:t>샘플을 굴려</a:t>
+              <a:t>샘플을 rollout해</a:t>
             </a:r>
           </a:p>
           <a:p>
@@ -40396,7 +40396,7 @@
                 <a:ea typeface="Malgun Gothic"/>
                 <a:cs typeface="Malgun Gothic"/>
               </a:rPr>
-              <a:t>비용이 낮은 rollout일수록 큰 표를 받는다</a:t>
+              <a:t>비용이 낮은 rollout일수록 가중치가 크다</a:t>
             </a:r>
           </a:p>
         </p:txBody>
@@ -40525,7 +40525,7 @@
                 <a:ea typeface="Malgun Gothic"/>
                 <a:cs typeface="Malgun Gothic"/>
               </a:rPr>
-              <a:t>잡음 섞은 제어열 후보를 GPU로 한꺼번에 굴린다.</a:t>
+              <a:t>노이즈를 섞은 제어 시퀀스 후보를 GPU로 한꺼번에 rollout한다.</a:t>
             </a:r>
           </a:p>
         </p:txBody>
@@ -40655,7 +40655,7 @@
                 <a:ea typeface="Malgun Gothic"/>
                 <a:cs typeface="Malgun Gothic"/>
               </a:rPr>
-              <a:t>개, 지평 </a:t>
+              <a:t>개, horizon </a:t>
             </a:r>
             <a:r>
               <a:rPr sz="1250" b="1" i="0">
@@ -41069,9 +41069,9 @@
                 <a:tableStyleId>{5C22544A-7EE6-4342-B048-85BDC9FD1C3A}</a:tableStyleId>
               </a:tblPr>
               <a:tblGrid>
-                <a:gridCol w="1307703"/>
-                <a:gridCol w="2706489"/>
-                <a:gridCol w="6755408"/>
+                <a:gridCol w="1229916"/>
+                <a:gridCol w="2545556"/>
+                <a:gridCol w="6994128"/>
               </a:tblGrid>
               <a:tr h="263634">
                 <a:tc>
@@ -41358,7 +41358,7 @@
                           <a:ea typeface="Malgun Gothic"/>
                           <a:cs typeface="Malgun Gothic"/>
                         </a:rPr>
-                        <a:t>정규 × 로그정규 분포에서 샘플해 실행 가능한 궤적을 늘린다</a:t>
+                        <a:t>정규 × 로그정규 분포에서 샘플링해 실행 가능한 궤적을 늘린다</a:t>
                       </a:r>
                     </a:p>
                   </a:txBody>
@@ -41654,7 +41654,7 @@
                           <a:ea typeface="Malgun Gothic"/>
                           <a:cs typeface="Malgun Gothic"/>
                         </a:rPr>
-                        <a:t>반복마다 잡음을 줄이는 확산식 담금질로 샘플 분포를 좁힌다(4족 관절 토크)</a:t>
+                        <a:t>반복마다 노이즈를 줄이는 diffusion 방식 annealing으로 샘플 분포를 좁힌다(4족 관절 토크)</a:t>
                       </a:r>
                     </a:p>
                   </a:txBody>
@@ -41728,7 +41728,7 @@
                           <a:ea typeface="Malgun Gothic"/>
                           <a:cs typeface="Malgun Gothic"/>
                         </a:rPr>
-                        <a:t>rollout에서 되먹임 이득을 얻어 풀이 사이와 지연을 메운다</a:t>
+                        <a:t>rollout에서 피드백 이득을 얻어 최적화 주기 사이와 지연을 메운다</a:t>
                       </a:r>
                     </a:p>
                   </a:txBody>
@@ -42588,7 +42588,7 @@
         <p:spPr>
           <a:xfrm>
             <a:off x="711200" y="1906488"/>
-            <a:ext cx="5440934" cy="669925"/>
+            <a:ext cx="5440934" cy="979488"/>
           </a:xfrm>
           <a:prstGeom prst="rect">
             <a:avLst/>
@@ -42615,7 +42615,7 @@
                 <a:ea typeface="Malgun Gothic"/>
                 <a:cs typeface="Malgun Gothic"/>
               </a:rPr>
-              <a:t>표준 MPPI는 스텝마다 독립인 잡음을 제어값에 더해 제어가 떨린다. SMPPI는 잡음을 한 차수 높은 공간에서 뽑아 적분한다. MPPI 유도는 그대로 지킨다.</a:t>
+              <a:t>표준 MPPI는 스텝마다 독립인 노이즈를 제어값에 더하므로 제어가 떨린다. SMPPI는 노이즈를 한 차수 높은 공간에서 샘플링해 적분한다. MPPI 유도는 그대로 지킨다.</a:t>
             </a:r>
           </a:p>
         </p:txBody>
@@ -43892,7 +43892,7 @@
                 <a:ea typeface="Malgun Gothic"/>
                 <a:cs typeface="Malgun Gothic"/>
               </a:rPr>
-              <a:t>워밍스타트(왼쪽)는 매번 중심을 prior로 되돌린다. 그래서 최적화기의 보정을 버린다.</a:t>
+              <a:t>warm start(왼쪽)는 매번 샘플 분포의 중심을 prior로 되돌린다. 그래서 최적화기가 쌓은 보정을 버린다.</a:t>
             </a:r>
           </a:p>
         </p:txBody>
@@ -43935,7 +43935,7 @@
                 <a:ea typeface="Malgun Gothic"/>
                 <a:cs typeface="Malgun Gothic"/>
               </a:rPr>
-              <a:t>ProxPI(오른쪽)는 이전 해를 중심으로 샘플하고 prior는 근접 비용으로만 둔다. 보정이 반복마다 쌓인다.</a:t>
+              <a:t>ProxPI(오른쪽)는 이전 해를 중심으로 샘플링하고 prior는 proximal 비용으로만 둔다. 보정이 반복마다 쌓인다.</a:t>
             </a:r>
           </a:p>
         </p:txBody>
@@ -44076,7 +44076,7 @@
                 <a:ea typeface="Malgun Gothic"/>
                 <a:cs typeface="Malgun Gothic"/>
               </a:rPr>
-              <a:t>ProxPI (Fig. 2): prior가 틀릴 때 MPPI, 워밍스타트, ProxPI의 행동(5개 로봇) — 출처 [1]</a:t>
+              <a:t>ProxPI (Fig. 2): prior가 틀릴 때 MPPI, warm start, ProxPI의 행동(5개 로봇) — 출처 [1]</a:t>
             </a:r>
           </a:p>
         </p:txBody>
@@ -44181,7 +44181,7 @@
                 <a:ea typeface="Malgun Gothic"/>
                 <a:cs typeface="Malgun Gothic"/>
               </a:rPr>
-              <a:t>로 받고 샘플의 30%만 경로 근처에서 뽑는다. 비용 항 단독과 비교할 튜닝 항목이다.</a:t>
+              <a:t>로 받고 샘플의 30%만 경로 근처에서 샘플링한다. 비용 항 단독과 비교할 튜닝 항목이다.</a:t>
             </a:r>
           </a:p>
         </p:txBody>
